--- a/curso/pptx/S64.pptx
+++ b/curso/pptx/S64.pptx
@@ -471,426 +471,6 @@
     </a:lvl9pPr>
   </p:notesStyle>
 </p:notesMaster>
-</file>
-
-<file path=ppt/notesSlides/notesSlide1.xml><?xml version="1.0" encoding="utf-8"?>
-<p:notes xmlns:a="http://schemas.openxmlformats.org/drawingml/2006/main" xmlns:p="http://schemas.openxmlformats.org/presentationml/2006/main" xmlns:r="http://schemas.openxmlformats.org/officeDocument/2006/relationships">
-  <p:cSld>
-    <p:spTree>
-      <p:nvGrpSpPr>
-        <p:cNvPr id="1" name=""/>
-        <p:cNvGrpSpPr/>
-        <p:nvPr/>
-      </p:nvGrpSpPr>
-      <p:grpSpPr>
-        <a:xfrm>
-          <a:off x="0" y="0"/>
-          <a:ext cx="0" cy="0"/>
-          <a:chOff x="0" y="0"/>
-          <a:chExt cx="0" cy="0"/>
-        </a:xfrm>
-      </p:grpSpPr>
-      <p:sp>
-        <p:nvSpPr>
-          <p:cNvPr id="2" name="Slide Image Placeholder 1"/>
-          <p:cNvSpPr>
-            <a:spLocks noGrp="1"/>
-          </p:cNvSpPr>
-          <p:nvPr>
-            <p:ph type="sldImg" idx="2"/>
-          </p:nvPr>
-        </p:nvSpPr>
-        <p:spPr/>
-      </p:sp>
-      <p:sp>
-        <p:nvSpPr>
-          <p:cNvPr id="3" name="Notes Placeholder 2"/>
-          <p:cNvSpPr>
-            <a:spLocks noGrp="1"/>
-          </p:cNvSpPr>
-          <p:nvPr>
-            <p:ph type="body" idx="3" sz="quarter"/>
-          </p:nvPr>
-        </p:nvSpPr>
-        <p:spPr/>
-        <p:txBody>
-          <a:bodyPr/>
-          <a:lstStyle/>
-          <a:p>
-            <a:r>
-              <a:t>3 minutos. Sin apuntes. Es para recordar, no cuenta para nota.</a:t>
-            </a:r>
-          </a:p>
-        </p:txBody>
-      </p:sp>
-      <p:sp>
-        <p:nvSpPr>
-          <p:cNvPr id="4" name="Slide Number Placeholder 3"/>
-          <p:cNvSpPr>
-            <a:spLocks noGrp="1"/>
-          </p:cNvSpPr>
-          <p:nvPr>
-            <p:ph type="sldNum" idx="5" sz="quarter"/>
-          </p:nvPr>
-        </p:nvSpPr>
-        <p:spPr/>
-      </p:sp>
-    </p:spTree>
-  </p:cSld>
-  <p:clrMapOvr>
-    <a:masterClrMapping/>
-  </p:clrMapOvr>
-</p:notes>
-</file>
-
-<file path=ppt/notesSlides/notesSlide2.xml><?xml version="1.0" encoding="utf-8"?>
-<p:notes xmlns:a="http://schemas.openxmlformats.org/drawingml/2006/main" xmlns:p="http://schemas.openxmlformats.org/presentationml/2006/main" xmlns:r="http://schemas.openxmlformats.org/officeDocument/2006/relationships">
-  <p:cSld>
-    <p:spTree>
-      <p:nvGrpSpPr>
-        <p:cNvPr id="1" name=""/>
-        <p:cNvGrpSpPr/>
-        <p:nvPr/>
-      </p:nvGrpSpPr>
-      <p:grpSpPr>
-        <a:xfrm>
-          <a:off x="0" y="0"/>
-          <a:ext cx="0" cy="0"/>
-          <a:chOff x="0" y="0"/>
-          <a:chExt cx="0" cy="0"/>
-        </a:xfrm>
-      </p:grpSpPr>
-      <p:sp>
-        <p:nvSpPr>
-          <p:cNvPr id="2" name="Slide Image Placeholder 1"/>
-          <p:cNvSpPr>
-            <a:spLocks noGrp="1"/>
-          </p:cNvSpPr>
-          <p:nvPr>
-            <p:ph type="sldImg" idx="2"/>
-          </p:nvPr>
-        </p:nvSpPr>
-        <p:spPr/>
-      </p:sp>
-      <p:sp>
-        <p:nvSpPr>
-          <p:cNvPr id="3" name="Notes Placeholder 2"/>
-          <p:cNvSpPr>
-            <a:spLocks noGrp="1"/>
-          </p:cNvSpPr>
-          <p:nvPr>
-            <p:ph type="body" idx="3" sz="quarter"/>
-          </p:nvPr>
-        </p:nvSpPr>
-        <p:spPr/>
-        <p:txBody>
-          <a:bodyPr/>
-          <a:lstStyle/>
-          <a:p>
-            <a:r>
-              <a:t>3 minutos. Sin apuntes. Es para recordar, no cuenta para nota.</a:t>
-            </a:r>
-          </a:p>
-        </p:txBody>
-      </p:sp>
-      <p:sp>
-        <p:nvSpPr>
-          <p:cNvPr id="4" name="Slide Number Placeholder 3"/>
-          <p:cNvSpPr>
-            <a:spLocks noGrp="1"/>
-          </p:cNvSpPr>
-          <p:nvPr>
-            <p:ph type="sldNum" idx="5" sz="quarter"/>
-          </p:nvPr>
-        </p:nvSpPr>
-        <p:spPr/>
-      </p:sp>
-    </p:spTree>
-  </p:cSld>
-  <p:clrMapOvr>
-    <a:masterClrMapping/>
-  </p:clrMapOvr>
-</p:notes>
-</file>
-
-<file path=ppt/notesSlides/notesSlide3.xml><?xml version="1.0" encoding="utf-8"?>
-<p:notes xmlns:a="http://schemas.openxmlformats.org/drawingml/2006/main" xmlns:p="http://schemas.openxmlformats.org/presentationml/2006/main" xmlns:r="http://schemas.openxmlformats.org/officeDocument/2006/relationships">
-  <p:cSld>
-    <p:spTree>
-      <p:nvGrpSpPr>
-        <p:cNvPr id="1" name=""/>
-        <p:cNvGrpSpPr/>
-        <p:nvPr/>
-      </p:nvGrpSpPr>
-      <p:grpSpPr>
-        <a:xfrm>
-          <a:off x="0" y="0"/>
-          <a:ext cx="0" cy="0"/>
-          <a:chOff x="0" y="0"/>
-          <a:chExt cx="0" cy="0"/>
-        </a:xfrm>
-      </p:grpSpPr>
-      <p:sp>
-        <p:nvSpPr>
-          <p:cNvPr id="2" name="Slide Image Placeholder 1"/>
-          <p:cNvSpPr>
-            <a:spLocks noGrp="1"/>
-          </p:cNvSpPr>
-          <p:nvPr>
-            <p:ph type="sldImg" idx="2"/>
-          </p:nvPr>
-        </p:nvSpPr>
-        <p:spPr/>
-      </p:sp>
-      <p:sp>
-        <p:nvSpPr>
-          <p:cNvPr id="3" name="Notes Placeholder 2"/>
-          <p:cNvSpPr>
-            <a:spLocks noGrp="1"/>
-          </p:cNvSpPr>
-          <p:nvPr>
-            <p:ph type="body" idx="3" sz="quarter"/>
-          </p:nvPr>
-        </p:nvSpPr>
-        <p:spPr/>
-        <p:txBody>
-          <a:bodyPr/>
-          <a:lstStyle/>
-          <a:p>
-            <a:r>
-              <a:t>Nadie tiene que contestar: solo pensarlo.</a:t>
-            </a:r>
-          </a:p>
-        </p:txBody>
-      </p:sp>
-      <p:sp>
-        <p:nvSpPr>
-          <p:cNvPr id="4" name="Slide Number Placeholder 3"/>
-          <p:cNvSpPr>
-            <a:spLocks noGrp="1"/>
-          </p:cNvSpPr>
-          <p:nvPr>
-            <p:ph type="sldNum" idx="5" sz="quarter"/>
-          </p:nvPr>
-        </p:nvSpPr>
-        <p:spPr/>
-      </p:sp>
-    </p:spTree>
-  </p:cSld>
-  <p:clrMapOvr>
-    <a:masterClrMapping/>
-  </p:clrMapOvr>
-</p:notes>
-</file>
-
-<file path=ppt/notesSlides/notesSlide4.xml><?xml version="1.0" encoding="utf-8"?>
-<p:notes xmlns:a="http://schemas.openxmlformats.org/drawingml/2006/main" xmlns:p="http://schemas.openxmlformats.org/presentationml/2006/main" xmlns:r="http://schemas.openxmlformats.org/officeDocument/2006/relationships">
-  <p:cSld>
-    <p:spTree>
-      <p:nvGrpSpPr>
-        <p:cNvPr id="1" name=""/>
-        <p:cNvGrpSpPr/>
-        <p:nvPr/>
-      </p:nvGrpSpPr>
-      <p:grpSpPr>
-        <a:xfrm>
-          <a:off x="0" y="0"/>
-          <a:ext cx="0" cy="0"/>
-          <a:chOff x="0" y="0"/>
-          <a:chExt cx="0" cy="0"/>
-        </a:xfrm>
-      </p:grpSpPr>
-      <p:sp>
-        <p:nvSpPr>
-          <p:cNvPr id="2" name="Slide Image Placeholder 1"/>
-          <p:cNvSpPr>
-            <a:spLocks noGrp="1"/>
-          </p:cNvSpPr>
-          <p:nvPr>
-            <p:ph type="sldImg" idx="2"/>
-          </p:nvPr>
-        </p:nvSpPr>
-        <p:spPr/>
-      </p:sp>
-      <p:sp>
-        <p:nvSpPr>
-          <p:cNvPr id="3" name="Notes Placeholder 2"/>
-          <p:cNvSpPr>
-            <a:spLocks noGrp="1"/>
-          </p:cNvSpPr>
-          <p:nvPr>
-            <p:ph type="body" idx="3" sz="quarter"/>
-          </p:nvPr>
-        </p:nvSpPr>
-        <p:spPr/>
-        <p:txBody>
-          <a:bodyPr/>
-          <a:lstStyle/>
-          <a:p>
-            <a:r>
-              <a:t>Dejar unos segundos para que piensen la respuesta fácil antes de enseñar los pasos.</a:t>
-            </a:r>
-          </a:p>
-        </p:txBody>
-      </p:sp>
-      <p:sp>
-        <p:nvSpPr>
-          <p:cNvPr id="4" name="Slide Number Placeholder 3"/>
-          <p:cNvSpPr>
-            <a:spLocks noGrp="1"/>
-          </p:cNvSpPr>
-          <p:nvPr>
-            <p:ph type="sldNum" idx="5" sz="quarter"/>
-          </p:nvPr>
-        </p:nvSpPr>
-        <p:spPr/>
-      </p:sp>
-    </p:spTree>
-  </p:cSld>
-  <p:clrMapOvr>
-    <a:masterClrMapping/>
-  </p:clrMapOvr>
-</p:notes>
-</file>
-
-<file path=ppt/notesSlides/notesSlide5.xml><?xml version="1.0" encoding="utf-8"?>
-<p:notes xmlns:a="http://schemas.openxmlformats.org/drawingml/2006/main" xmlns:p="http://schemas.openxmlformats.org/presentationml/2006/main" xmlns:r="http://schemas.openxmlformats.org/officeDocument/2006/relationships">
-  <p:cSld>
-    <p:spTree>
-      <p:nvGrpSpPr>
-        <p:cNvPr id="1" name=""/>
-        <p:cNvGrpSpPr/>
-        <p:nvPr/>
-      </p:nvGrpSpPr>
-      <p:grpSpPr>
-        <a:xfrm>
-          <a:off x="0" y="0"/>
-          <a:ext cx="0" cy="0"/>
-          <a:chOff x="0" y="0"/>
-          <a:chExt cx="0" cy="0"/>
-        </a:xfrm>
-      </p:grpSpPr>
-      <p:sp>
-        <p:nvSpPr>
-          <p:cNvPr id="2" name="Slide Image Placeholder 1"/>
-          <p:cNvSpPr>
-            <a:spLocks noGrp="1"/>
-          </p:cNvSpPr>
-          <p:nvPr>
-            <p:ph type="sldImg" idx="2"/>
-          </p:nvPr>
-        </p:nvSpPr>
-        <p:spPr/>
-      </p:sp>
-      <p:sp>
-        <p:nvSpPr>
-          <p:cNvPr id="3" name="Notes Placeholder 2"/>
-          <p:cNvSpPr>
-            <a:spLocks noGrp="1"/>
-          </p:cNvSpPr>
-          <p:nvPr>
-            <p:ph type="body" idx="3" sz="quarter"/>
-          </p:nvPr>
-        </p:nvSpPr>
-        <p:spPr/>
-        <p:txBody>
-          <a:bodyPr/>
-          <a:lstStyle/>
-          <a:p>
-            <a:r>
-              <a:t>Dejar 2 minutos para que lo escriban. La diapositiva siguiente muestra el resumen.</a:t>
-            </a:r>
-          </a:p>
-        </p:txBody>
-      </p:sp>
-      <p:sp>
-        <p:nvSpPr>
-          <p:cNvPr id="4" name="Slide Number Placeholder 3"/>
-          <p:cNvSpPr>
-            <a:spLocks noGrp="1"/>
-          </p:cNvSpPr>
-          <p:nvPr>
-            <p:ph type="sldNum" idx="5" sz="quarter"/>
-          </p:nvPr>
-        </p:nvSpPr>
-        <p:spPr/>
-      </p:sp>
-    </p:spTree>
-  </p:cSld>
-  <p:clrMapOvr>
-    <a:masterClrMapping/>
-  </p:clrMapOvr>
-</p:notes>
-</file>
-
-<file path=ppt/notesSlides/notesSlide6.xml><?xml version="1.0" encoding="utf-8"?>
-<p:notes xmlns:a="http://schemas.openxmlformats.org/drawingml/2006/main" xmlns:p="http://schemas.openxmlformats.org/presentationml/2006/main" xmlns:r="http://schemas.openxmlformats.org/officeDocument/2006/relationships">
-  <p:cSld>
-    <p:spTree>
-      <p:nvGrpSpPr>
-        <p:cNvPr id="1" name=""/>
-        <p:cNvGrpSpPr/>
-        <p:nvPr/>
-      </p:nvGrpSpPr>
-      <p:grpSpPr>
-        <a:xfrm>
-          <a:off x="0" y="0"/>
-          <a:ext cx="0" cy="0"/>
-          <a:chOff x="0" y="0"/>
-          <a:chExt cx="0" cy="0"/>
-        </a:xfrm>
-      </p:grpSpPr>
-      <p:sp>
-        <p:nvSpPr>
-          <p:cNvPr id="2" name="Slide Image Placeholder 1"/>
-          <p:cNvSpPr>
-            <a:spLocks noGrp="1"/>
-          </p:cNvSpPr>
-          <p:nvPr>
-            <p:ph type="sldImg" idx="2"/>
-          </p:nvPr>
-        </p:nvSpPr>
-        <p:spPr/>
-      </p:sp>
-      <p:sp>
-        <p:nvSpPr>
-          <p:cNvPr id="3" name="Notes Placeholder 2"/>
-          <p:cNvSpPr>
-            <a:spLocks noGrp="1"/>
-          </p:cNvSpPr>
-          <p:nvPr>
-            <p:ph type="body" idx="3" sz="quarter"/>
-          </p:nvPr>
-        </p:nvSpPr>
-        <p:spPr/>
-        <p:txBody>
-          <a:bodyPr/>
-          <a:lstStyle/>
-          <a:p>
-            <a:r>
-              <a:t>Buscar: «qué es un grupo social» · «grupo social características explicación»</a:t>
-            </a:r>
-          </a:p>
-        </p:txBody>
-      </p:sp>
-      <p:sp>
-        <p:nvSpPr>
-          <p:cNvPr id="4" name="Slide Number Placeholder 3"/>
-          <p:cNvSpPr>
-            <a:spLocks noGrp="1"/>
-          </p:cNvSpPr>
-          <p:nvPr>
-            <p:ph type="sldNum" idx="5" sz="quarter"/>
-          </p:nvPr>
-        </p:nvSpPr>
-        <p:spPr/>
-      </p:sp>
-    </p:spTree>
-  </p:cSld>
-  <p:clrMapOvr>
-    <a:masterClrMapping/>
-  </p:clrMapOvr>
-</p:notes>
 </file>
 
 <file path=ppt/slideLayouts/slideLayout1.xml><?xml version="1.0" encoding="utf-8"?>

--- a/curso/pptx/S64.pptx
+++ b/curso/pptx/S64.pptx
@@ -4026,7 +4026,7 @@
                 </a:solidFill>
                 <a:latin typeface="Fredoka"/>
               </a:rPr>
-              <a:t>Caso 2 · La cuadrilla de Naiara</a:t>
+              <a:t>Caso 2 · Una cuadrilla</a:t>
             </a:r>
           </a:p>
         </p:txBody>
@@ -4108,7 +4108,7 @@
                 </a:solidFill>
                 <a:latin typeface="Nunito Sans"/>
               </a:rPr>
-              <a:t>Naiara y cinco amigas quedan cada sábado. Yasmin organiza los planes. Tienen una regla: lo que se cuenta en la cuadrilla no sale de ahí.</a:t>
+              <a:t>Una chica y cinco amigas quedan cada sábado. Una de ellas organiza los planes. Tienen una regla: lo que se cuenta en la cuadrilla no sale de ahí.</a:t>
             </a:r>
           </a:p>
         </p:txBody>
@@ -4206,7 +4206,7 @@
                 </a:solidFill>
                 <a:latin typeface="Nunito Sans"/>
               </a:rPr>
-              <a:t>¿Normas y roles? Sí: una norma no escrita, y Yasmin tiene el rol de organizar.</a:t>
+              <a:t>¿Normas y roles? Sí: una norma no escrita, y una de ellas tiene el rol de organizar.</a:t>
             </a:r>
           </a:p>
           <a:p>
@@ -4726,7 +4726,7 @@
                 </a:solidFill>
                 <a:latin typeface="Nunito Sans"/>
               </a:rPr>
-              <a:t>Omar, Chen y cuatro más juegan juntos online cada tarde desde hace dos años. Nunca se han visto en persona.</a:t>
+              <a:t>Un chico, otro chico y cuatro más juegan juntos online cada tarde desde hace dos años. Nunca se han visto en persona.</a:t>
             </a:r>
           </a:p>
         </p:txBody>
@@ -4824,7 +4824,7 @@
                 </a:solidFill>
                 <a:latin typeface="Nunito Sans"/>
               </a:rPr>
-              <a:t>Pero se relacionan cada día, quieren ganar juntos, tienen normas y roles: Chen es el que cura.</a:t>
+              <a:t>Pero se relacionan cada día, quieren ganar juntos, tienen normas y roles: uno es el que cura.</a:t>
             </a:r>
           </a:p>
           <a:p>
